--- a/presentacion/graficas_explotacion.pptx
+++ b/presentacion/graficas_explotacion.pptx
@@ -5931,7 +5931,7 @@
           <a:p>
             <a:fld id="{722897CA-62A3-FF4A-8236-48D12DED5039}" type="datetimeFigureOut">
               <a:rPr lang="es-ES" smtClean="0"/>
-              <a:t>30/9/25</a:t>
+              <a:t>2/10/26</a:t>
             </a:fld>
             <a:endParaRPr lang="es-ES"/>
           </a:p>
@@ -6431,7 +6431,7 @@
           <a:p>
             <a:fld id="{BDD2585B-0C3F-E94A-B774-0A46A528480F}" type="datetimeFigureOut">
               <a:rPr lang="en-ES" smtClean="0"/>
-              <a:t>9/30/25</a:t>
+              <a:t>10/2/26</a:t>
             </a:fld>
             <a:endParaRPr lang="en-ES"/>
           </a:p>
@@ -6631,7 +6631,7 @@
           <a:p>
             <a:fld id="{BDD2585B-0C3F-E94A-B774-0A46A528480F}" type="datetimeFigureOut">
               <a:rPr lang="en-ES" smtClean="0"/>
-              <a:t>9/30/25</a:t>
+              <a:t>10/2/26</a:t>
             </a:fld>
             <a:endParaRPr lang="en-ES"/>
           </a:p>
@@ -6841,7 +6841,7 @@
           <a:p>
             <a:fld id="{BDD2585B-0C3F-E94A-B774-0A46A528480F}" type="datetimeFigureOut">
               <a:rPr lang="en-ES" smtClean="0"/>
-              <a:t>9/30/25</a:t>
+              <a:t>10/2/26</a:t>
             </a:fld>
             <a:endParaRPr lang="en-ES"/>
           </a:p>
@@ -7041,7 +7041,7 @@
           <a:p>
             <a:fld id="{BDD2585B-0C3F-E94A-B774-0A46A528480F}" type="datetimeFigureOut">
               <a:rPr lang="en-ES" smtClean="0"/>
-              <a:t>9/30/25</a:t>
+              <a:t>10/2/26</a:t>
             </a:fld>
             <a:endParaRPr lang="en-ES"/>
           </a:p>
@@ -7317,7 +7317,7 @@
           <a:p>
             <a:fld id="{BDD2585B-0C3F-E94A-B774-0A46A528480F}" type="datetimeFigureOut">
               <a:rPr lang="en-ES" smtClean="0"/>
-              <a:t>9/30/25</a:t>
+              <a:t>10/2/26</a:t>
             </a:fld>
             <a:endParaRPr lang="en-ES"/>
           </a:p>
@@ -7585,7 +7585,7 @@
           <a:p>
             <a:fld id="{BDD2585B-0C3F-E94A-B774-0A46A528480F}" type="datetimeFigureOut">
               <a:rPr lang="en-ES" smtClean="0"/>
-              <a:t>9/30/25</a:t>
+              <a:t>10/2/26</a:t>
             </a:fld>
             <a:endParaRPr lang="en-ES"/>
           </a:p>
@@ -8000,7 +8000,7 @@
           <a:p>
             <a:fld id="{BDD2585B-0C3F-E94A-B774-0A46A528480F}" type="datetimeFigureOut">
               <a:rPr lang="en-ES" smtClean="0"/>
-              <a:t>9/30/25</a:t>
+              <a:t>10/2/26</a:t>
             </a:fld>
             <a:endParaRPr lang="en-ES"/>
           </a:p>
@@ -8142,7 +8142,7 @@
           <a:p>
             <a:fld id="{BDD2585B-0C3F-E94A-B774-0A46A528480F}" type="datetimeFigureOut">
               <a:rPr lang="en-ES" smtClean="0"/>
-              <a:t>9/30/25</a:t>
+              <a:t>10/2/26</a:t>
             </a:fld>
             <a:endParaRPr lang="en-ES"/>
           </a:p>
@@ -8255,7 +8255,7 @@
           <a:p>
             <a:fld id="{BDD2585B-0C3F-E94A-B774-0A46A528480F}" type="datetimeFigureOut">
               <a:rPr lang="en-ES" smtClean="0"/>
-              <a:t>9/30/25</a:t>
+              <a:t>10/2/26</a:t>
             </a:fld>
             <a:endParaRPr lang="en-ES"/>
           </a:p>
@@ -8568,7 +8568,7 @@
           <a:p>
             <a:fld id="{BDD2585B-0C3F-E94A-B774-0A46A528480F}" type="datetimeFigureOut">
               <a:rPr lang="en-ES" smtClean="0"/>
-              <a:t>9/30/25</a:t>
+              <a:t>10/2/26</a:t>
             </a:fld>
             <a:endParaRPr lang="en-ES"/>
           </a:p>
@@ -8857,7 +8857,7 @@
           <a:p>
             <a:fld id="{BDD2585B-0C3F-E94A-B774-0A46A528480F}" type="datetimeFigureOut">
               <a:rPr lang="en-ES" smtClean="0"/>
-              <a:t>9/30/25</a:t>
+              <a:t>10/2/26</a:t>
             </a:fld>
             <a:endParaRPr lang="en-ES"/>
           </a:p>
@@ -9100,7 +9100,7 @@
           <a:p>
             <a:fld id="{BDD2585B-0C3F-E94A-B774-0A46A528480F}" type="datetimeFigureOut">
               <a:rPr lang="en-ES" smtClean="0"/>
-              <a:t>9/30/25</a:t>
+              <a:t>10/2/26</a:t>
             </a:fld>
             <a:endParaRPr lang="en-ES"/>
           </a:p>
@@ -19999,8 +19999,37 @@
                   <a:srgbClr val="FFC000"/>
                 </a:solidFill>
               </a:rPr>
-              <a:t>: Cuotas cuando N ~K/2, equilibrio</a:t>
+              <a:t>: Cuotas cuando N ~K/2</a:t>
             </a:r>
+            <a:r>
+              <a:rPr lang="en-ES" sz="1500">
+                <a:solidFill>
+                  <a:srgbClr val="FFC000"/>
+                </a:solidFill>
+              </a:rPr>
+              <a:t>, equilibrio</a:t>
+            </a:r>
+            <a:r>
+              <a:rPr lang="es-ES" sz="1500" dirty="0">
+                <a:solidFill>
+                  <a:srgbClr val="FFC000"/>
+                </a:solidFill>
+              </a:rPr>
+              <a:t> </a:t>
+            </a:r>
+            <a:r>
+              <a:rPr lang="es-ES" sz="1500" b="1" dirty="0">
+                <a:solidFill>
+                  <a:srgbClr val="FFC000"/>
+                </a:solidFill>
+              </a:rPr>
+              <a:t>inestable</a:t>
+            </a:r>
+            <a:endParaRPr lang="en-ES" sz="1500" b="1" dirty="0">
+              <a:solidFill>
+                <a:srgbClr val="FFC000"/>
+              </a:solidFill>
+            </a:endParaRPr>
           </a:p>
         </p:txBody>
       </p:sp>
@@ -28650,7 +28679,7 @@
         <p:spPr>
           <a:xfrm>
             <a:off x="1317459" y="4007237"/>
-            <a:ext cx="3991477" cy="323165"/>
+            <a:ext cx="4168959" cy="553998"/>
           </a:xfrm>
           <a:prstGeom prst="rect">
             <a:avLst/>
@@ -28658,7 +28687,7 @@
           <a:noFill/>
         </p:spPr>
         <p:txBody>
-          <a:bodyPr wrap="none" rtlCol="0">
+          <a:bodyPr wrap="square" rtlCol="0">
             <a:spAutoFit/>
           </a:bodyPr>
           <a:lstStyle/>
@@ -28689,8 +28718,29 @@
                   <a:srgbClr val="FF0000"/>
                 </a:solidFill>
               </a:rPr>
-              <a:t>:  Esfuerzos altos, extinguen la población</a:t>
+              <a:t>:  Esfuerzos altos</a:t>
             </a:r>
+            <a:r>
+              <a:rPr lang="en-ES" sz="1500">
+                <a:solidFill>
+                  <a:srgbClr val="FF0000"/>
+                </a:solidFill>
+              </a:rPr>
+              <a:t>, </a:t>
+            </a:r>
+            <a:r>
+              <a:rPr lang="es-ES" sz="1500" dirty="0">
+                <a:solidFill>
+                  <a:srgbClr val="FF0000"/>
+                </a:solidFill>
+              </a:rPr>
+              <a:t>riesgo de extinguir población y rendimientos decrecientes</a:t>
+            </a:r>
+            <a:endParaRPr lang="en-ES" sz="1500" dirty="0">
+              <a:solidFill>
+                <a:srgbClr val="FF0000"/>
+              </a:solidFill>
+            </a:endParaRPr>
           </a:p>
         </p:txBody>
       </p:sp>
@@ -28708,7 +28758,7 @@
         </p:nvSpPr>
         <p:spPr>
           <a:xfrm>
-            <a:off x="1317460" y="4297208"/>
+            <a:off x="1317460" y="4547728"/>
             <a:ext cx="4606084" cy="553998"/>
           </a:xfrm>
           <a:prstGeom prst="rect">
@@ -28767,7 +28817,7 @@
         </p:nvSpPr>
         <p:spPr>
           <a:xfrm>
-            <a:off x="1317459" y="4863085"/>
+            <a:off x="1317459" y="5113605"/>
             <a:ext cx="4168960" cy="553998"/>
           </a:xfrm>
           <a:prstGeom prst="rect">
@@ -28813,8 +28863,55 @@
                   </a:schemeClr>
                 </a:solidFill>
               </a:rPr>
-              <a:t>:  Esfuerzos bajos, equilibrio estable con menor rendimiento</a:t>
+              <a:t>:  Esfuerzos bajos, equilibrio estable </a:t>
             </a:r>
+            <a:r>
+              <a:rPr lang="en-ES" sz="1500">
+                <a:solidFill>
+                  <a:schemeClr val="accent6">
+                    <a:lumMod val="75000"/>
+                  </a:schemeClr>
+                </a:solidFill>
+              </a:rPr>
+              <a:t>con </a:t>
+            </a:r>
+            <a:r>
+              <a:rPr lang="es-ES" sz="1500" dirty="0">
+                <a:solidFill>
+                  <a:schemeClr val="accent6">
+                    <a:lumMod val="75000"/>
+                  </a:schemeClr>
+                </a:solidFill>
+              </a:rPr>
+              <a:t>mayor</a:t>
+            </a:r>
+            <a:r>
+              <a:rPr lang="en-ES" sz="1500">
+                <a:solidFill>
+                  <a:schemeClr val="accent6">
+                    <a:lumMod val="75000"/>
+                  </a:schemeClr>
+                </a:solidFill>
+              </a:rPr>
+              <a:t> rendimiento</a:t>
+            </a:r>
+            <a:r>
+              <a:rPr lang="es-ES" sz="1500" dirty="0">
+                <a:solidFill>
+                  <a:schemeClr val="accent6">
+                    <a:lumMod val="75000"/>
+                  </a:schemeClr>
+                </a:solidFill>
+              </a:rPr>
+              <a:t> por unidad de esfuerzo</a:t>
+            </a:r>
+            <a:endParaRPr lang="en-ES" sz="1500" dirty="0">
+              <a:solidFill>
+                <a:schemeClr val="accent6">
+                  <a:lumMod val="75000"/>
+                </a:schemeClr>
+              </a:solidFill>
+            </a:endParaRPr>
           </a:p>
         </p:txBody>
       </p:sp>
@@ -30730,6 +30827,86 @@
             </a:lvl9pPr>
           </a:lstStyle>
           <a:p>
+            <a:pPr marL="0" marR="0" lvl="0" indent="0" fontAlgn="auto">
+              <a:spcAft>
+                <a:spcPts val="0"/>
+              </a:spcAft>
+              <a:buClrTx/>
+              <a:buSzTx/>
+              <a:tabLst/>
+              <a:defRPr/>
+            </a:pPr>
+            <a:r>
+              <a:rPr lang="es-ES" altLang="es-ES" dirty="0"/>
+              <a:t>Limitaciones:</a:t>
+            </a:r>
+          </a:p>
+          <a:p>
+            <a:pPr marL="273050" marR="0" lvl="0" indent="-273050" fontAlgn="auto">
+              <a:spcAft>
+                <a:spcPts val="0"/>
+              </a:spcAft>
+              <a:buClrTx/>
+              <a:buSzTx/>
+              <a:buFont typeface="Arial" panose="020B0604020202020204" pitchFamily="34" charset="0"/>
+              <a:buChar char="•"/>
+              <a:tabLst/>
+              <a:defRPr/>
+            </a:pPr>
+            <a:r>
+              <a:rPr lang="es-ES" altLang="es-ES" sz="2400" b="0" dirty="0"/>
+              <a:t>Si no se mide correctamente la eficiencia de recolección, puede llevar a una sobreexplotación inadvertida.</a:t>
+            </a:r>
+          </a:p>
+          <a:p>
+            <a:pPr marL="273050" marR="0" lvl="0" indent="-273050" fontAlgn="auto">
+              <a:spcAft>
+                <a:spcPts val="0"/>
+              </a:spcAft>
+              <a:buClrTx/>
+              <a:buSzTx/>
+              <a:buFont typeface="Arial" panose="020B0604020202020204" pitchFamily="34" charset="0"/>
+              <a:buChar char="•"/>
+              <a:tabLst/>
+              <a:defRPr/>
+            </a:pPr>
+            <a:r>
+              <a:rPr lang="es-ES" altLang="es-ES" sz="2400" b="0" dirty="0"/>
+              <a:t>En especies con alta variabilidad en sus tasas de crecimiento o mortalidad, puede ser difícil predecir con exactitud el esfuerzo adecuado.</a:t>
+            </a:r>
+          </a:p>
+          <a:p>
+            <a:pPr marL="273050" marR="0" lvl="0" indent="-273050" fontAlgn="auto">
+              <a:spcAft>
+                <a:spcPts val="0"/>
+              </a:spcAft>
+              <a:buClrTx/>
+              <a:buSzTx/>
+              <a:buFont typeface="Arial" panose="020B0604020202020204" pitchFamily="34" charset="0"/>
+              <a:buChar char="•"/>
+              <a:tabLst/>
+              <a:defRPr/>
+            </a:pPr>
+            <a:r>
+              <a:rPr lang="es-ES" altLang="es-ES" sz="2400" b="0" dirty="0"/>
+              <a:t>Capturas más variables </a:t>
+            </a:r>
+          </a:p>
+          <a:p>
+            <a:pPr marL="273050" marR="0" lvl="0" indent="-273050" fontAlgn="auto">
+              <a:spcAft>
+                <a:spcPts val="0"/>
+              </a:spcAft>
+              <a:buClrTx/>
+              <a:buSzTx/>
+              <a:buFont typeface="Arial" panose="020B0604020202020204" pitchFamily="34" charset="0"/>
+              <a:buChar char="•"/>
+              <a:tabLst/>
+              <a:defRPr/>
+            </a:pPr>
+            <a:endParaRPr lang="es-ES_tradnl" altLang="en-US" dirty="0"/>
+          </a:p>
+          <a:p>
             <a:pPr marL="0" indent="0"/>
             <a:r>
               <a:rPr lang="es-ES_tradnl" altLang="en-US" dirty="0"/>
@@ -30779,52 +30956,6 @@
           <a:p>
             <a:pPr marL="0" indent="0"/>
             <a:endParaRPr lang="es-ES" altLang="es-ES" dirty="0"/>
-          </a:p>
-          <a:p>
-            <a:pPr marL="0" indent="0"/>
-            <a:r>
-              <a:rPr lang="es-ES" altLang="es-ES" dirty="0"/>
-              <a:t>Limitaciones:</a:t>
-            </a:r>
-          </a:p>
-          <a:p>
-            <a:pPr>
-              <a:buFontTx/>
-              <a:buChar char="•"/>
-              <a:defRPr/>
-            </a:pPr>
-            <a:r>
-              <a:rPr lang="es-ES" altLang="es-ES" sz="2400" b="0" dirty="0">
-                <a:latin typeface="+mn-lt"/>
-              </a:rPr>
-              <a:t>Si no se mide correctamente la eficiencia de recolección, puede llevar a una sobreexplotación inadvertida.</a:t>
-            </a:r>
-          </a:p>
-          <a:p>
-            <a:pPr>
-              <a:buFontTx/>
-              <a:buChar char="•"/>
-              <a:defRPr/>
-            </a:pPr>
-            <a:r>
-              <a:rPr lang="es-ES" altLang="es-ES" sz="2400" b="0" dirty="0">
-                <a:latin typeface="+mn-lt"/>
-              </a:rPr>
-              <a:t>En especies con alta variabilidad en sus tasas de crecimiento o mortalidad, puede ser difícil predecir con exactitud el esfuerzo adecuado.</a:t>
-            </a:r>
-          </a:p>
-          <a:p>
-            <a:pPr>
-              <a:buFontTx/>
-              <a:buChar char="•"/>
-              <a:defRPr/>
-            </a:pPr>
-            <a:r>
-              <a:rPr lang="es-ES" altLang="es-ES" sz="2400" b="0" dirty="0">
-                <a:latin typeface="+mn-lt"/>
-              </a:rPr>
-              <a:t>Capturas más variables </a:t>
-            </a:r>
           </a:p>
           <a:p>
             <a:pPr marL="0" indent="0"/>
